--- a/docs/presentations/FHIR_R4_Platform_Technical_Updated.pptx
+++ b/docs/presentations/FHIR_R4_Platform_Technical_Updated.pptx
@@ -15246,37 +15246,6 @@
       </p:sp>
       <p:sp>
         <p:nvSpPr>
-          <p:cNvPr id="4" name="Shape 2"/>
-          <p:cNvSpPr/>
-          <p:nvPr/>
-        </p:nvSpPr>
-        <p:spPr>
-          <a:xfrm>
-            <a:off x="476250" y="1743075"/>
-            <a:ext cx="4476750" cy="4638675"/>
-          </a:xfrm>
-          <a:prstGeom prst="roundRect">
-            <a:avLst/>
-          </a:prstGeom>
-          <a:solidFill>
-            <a:srgbClr val="000000">
-              <a:alpha val="0"/>
-            </a:srgbClr>
-          </a:solidFill>
-          <a:ln>
-            <a:miter lim="800000"/>
-          </a:ln>
-        </p:spPr>
-        <p:txBody>
-          <a:bodyPr/>
-          <a:lstStyle/>
-          <a:p>
-            <a:endParaRPr lang="en-US"/>
-          </a:p>
-        </p:txBody>
-      </p:sp>
-      <p:sp>
-        <p:nvSpPr>
           <p:cNvPr id="5" name="Text 3"/>
           <p:cNvSpPr/>
           <p:nvPr/>
@@ -15552,6 +15521,36 @@
           </a:p>
         </p:txBody>
       </p:sp>
+      <p:pic>
+        <p:nvPicPr>
+          <p:cNvPr id="7" name="Picture 6">
+            <a:extLst>
+              <a:ext uri="{FF2B5EF4-FFF2-40B4-BE49-F238E27FC236}">
+                <a16:creationId xmlns:a16="http://schemas.microsoft.com/office/drawing/2014/main" id="{FA484F8F-0F3A-2970-465E-348FB400C6D3}"/>
+              </a:ext>
+            </a:extLst>
+          </p:cNvPr>
+          <p:cNvPicPr>
+            <a:picLocks noChangeAspect="1"/>
+          </p:cNvPicPr>
+          <p:nvPr/>
+        </p:nvPicPr>
+        <p:blipFill>
+          <a:blip r:embed="rId3"/>
+          <a:stretch>
+            <a:fillRect/>
+          </a:stretch>
+        </p:blipFill>
+        <p:spPr>
+          <a:xfrm>
+            <a:off x="824248" y="1993511"/>
+            <a:ext cx="3877614" cy="3877614"/>
+          </a:xfrm>
+          <a:prstGeom prst="rect">
+            <a:avLst/>
+          </a:prstGeom>
+        </p:spPr>
+      </p:pic>
     </p:spTree>
   </p:cSld>
   <p:clrMapOvr>
@@ -41869,7 +41868,7 @@
         </p:nvSpPr>
         <p:spPr>
           <a:xfrm>
-            <a:off x="6191250" y="3648075"/>
+            <a:off x="6062464" y="3673831"/>
             <a:ext cx="2476500" cy="857250"/>
           </a:xfrm>
           <a:prstGeom prst="rect">
@@ -42374,7 +42373,7 @@
         </p:nvSpPr>
         <p:spPr>
           <a:xfrm>
-            <a:off x="6191250" y="4857750"/>
+            <a:off x="6007695" y="4857750"/>
             <a:ext cx="2476500" cy="933450"/>
           </a:xfrm>
           <a:prstGeom prst="rect">
@@ -42998,7 +42997,7 @@
               </a:defRPr>
             </a:pPr>
             <a:r>
-              <a:rPr sz="1275" b="0">
+              <a:rPr sz="1000" b="0" dirty="0">
                 <a:solidFill>
                   <a:srgbClr val="5D6C79"/>
                 </a:solidFill>
@@ -43275,15 +43274,16 @@
         <p:nvCxnSpPr>
           <p:cNvPr id="134" name="Straight Arrow Connector 133"/>
           <p:cNvCxnSpPr>
+            <a:cxnSpLocks/>
             <a:stCxn id="51" idx="3"/>
-            <a:endCxn id="52" idx="1"/>
+            <a:endCxn id="19" idx="1"/>
           </p:cNvCxnSpPr>
           <p:nvPr/>
         </p:nvCxnSpPr>
         <p:spPr>
           <a:xfrm>
             <a:off x="2928938" y="4095751"/>
-            <a:ext cx="3257550" cy="0"/>
+            <a:ext cx="3133526" cy="6705"/>
           </a:xfrm>
           <a:prstGeom prst="straightConnector1">
             <a:avLst/>
@@ -43775,15 +43775,15 @@
         <p:nvCxnSpPr>
           <p:cNvPr id="148" name="Straight Arrow Connector 147"/>
           <p:cNvCxnSpPr>
-            <a:stCxn id="65" idx="3"/>
-            <a:endCxn id="66" idx="1"/>
+            <a:cxnSpLocks/>
+            <a:endCxn id="68" idx="2"/>
           </p:cNvCxnSpPr>
           <p:nvPr/>
         </p:nvCxnSpPr>
         <p:spPr>
-          <a:xfrm>
-            <a:off x="8672513" y="4095751"/>
-            <a:ext cx="133350" cy="0"/>
+          <a:xfrm flipV="1">
+            <a:off x="8538964" y="4100513"/>
+            <a:ext cx="271662" cy="1943"/>
           </a:xfrm>
           <a:prstGeom prst="straightConnector1">
             <a:avLst/>
@@ -44216,15 +44216,16 @@
         <p:nvCxnSpPr>
           <p:cNvPr id="161" name="Straight Arrow Connector 160"/>
           <p:cNvCxnSpPr>
-            <a:stCxn id="78" idx="3"/>
+            <a:cxnSpLocks/>
+            <a:stCxn id="28" idx="3"/>
             <a:endCxn id="79" idx="1"/>
           </p:cNvCxnSpPr>
           <p:nvPr/>
         </p:nvCxnSpPr>
         <p:spPr>
-          <a:xfrm>
-            <a:off x="8672513" y="5314951"/>
-            <a:ext cx="371475" cy="0"/>
+          <a:xfrm flipV="1">
+            <a:off x="8484195" y="5314951"/>
+            <a:ext cx="559793" cy="9524"/>
           </a:xfrm>
           <a:prstGeom prst="straightConnector1">
             <a:avLst/>
@@ -44254,8 +44255,8 @@
         </p:nvSpPr>
         <p:spPr>
           <a:xfrm>
-            <a:off x="8610600" y="4924425"/>
-            <a:ext cx="552450" cy="238125"/>
+            <a:off x="8534400" y="4924425"/>
+            <a:ext cx="519113" cy="238125"/>
           </a:xfrm>
           <a:prstGeom prst="rect">
             <a:avLst/>
@@ -44284,7 +44285,7 @@
               </a:defRPr>
             </a:pPr>
             <a:r>
-              <a:rPr sz="1200" b="0">
+              <a:rPr sz="1000" b="0" dirty="0">
                 <a:solidFill>
                   <a:srgbClr val="5D6C79"/>
                 </a:solidFill>
